--- a/slides/3_probabilistic_models.pptx
+++ b/slides/3_probabilistic_models.pptx
@@ -5,7 +5,7 @@
     <p:sldMasterId id="2147483648" r:id="rId1"/>
   </p:sldMasterIdLst>
   <p:notesMasterIdLst>
-    <p:notesMasterId r:id="rId25"/>
+    <p:notesMasterId r:id="rId24"/>
   </p:notesMasterIdLst>
   <p:sldIdLst>
     <p:sldId id="256" r:id="rId2"/>
@@ -26,11 +26,10 @@
     <p:sldId id="279" r:id="rId17"/>
     <p:sldId id="670" r:id="rId18"/>
     <p:sldId id="669" r:id="rId19"/>
-    <p:sldId id="280" r:id="rId20"/>
-    <p:sldId id="668" r:id="rId21"/>
-    <p:sldId id="281" r:id="rId22"/>
-    <p:sldId id="284" r:id="rId23"/>
-    <p:sldId id="283" r:id="rId24"/>
+    <p:sldId id="668" r:id="rId20"/>
+    <p:sldId id="281" r:id="rId21"/>
+    <p:sldId id="284" r:id="rId22"/>
+    <p:sldId id="283" r:id="rId23"/>
   </p:sldIdLst>
   <p:sldSz cx="12192000" cy="6858000"/>
   <p:notesSz cx="6858000" cy="9144000"/>
@@ -501,7 +500,7 @@
           <a:p>
             <a:fld id="{506E0FD1-891F-4B1E-916D-E9B585160BB8}" type="datetimeFigureOut">
               <a:rPr lang="en-GB" smtClean="0"/>
-              <a:t>11/01/2026</a:t>
+              <a:t>11/03/2026</a:t>
             </a:fld>
             <a:endParaRPr lang="en-GB"/>
           </a:p>
@@ -918,7 +917,7 @@
           <a:p>
             <a:fld id="{D68C3F22-27B2-44E3-9C5F-D08126455F6F}" type="datetime1">
               <a:rPr lang="en-GB" smtClean="0"/>
-              <a:t>11/01/2026</a:t>
+              <a:t>11/03/2026</a:t>
             </a:fld>
             <a:endParaRPr lang="en-GB"/>
           </a:p>
@@ -1118,7 +1117,7 @@
           <a:p>
             <a:fld id="{1CD03846-7BF6-4FB6-A921-FF3379ADBD4C}" type="datetime1">
               <a:rPr lang="en-GB" smtClean="0"/>
-              <a:t>11/01/2026</a:t>
+              <a:t>11/03/2026</a:t>
             </a:fld>
             <a:endParaRPr lang="en-GB"/>
           </a:p>
@@ -1328,7 +1327,7 @@
           <a:p>
             <a:fld id="{99E1B91A-3FD0-4144-9C84-63E9688ED2FE}" type="datetime1">
               <a:rPr lang="en-GB" smtClean="0"/>
-              <a:t>11/01/2026</a:t>
+              <a:t>11/03/2026</a:t>
             </a:fld>
             <a:endParaRPr lang="en-GB"/>
           </a:p>
@@ -1528,7 +1527,7 @@
           <a:p>
             <a:fld id="{5295ED7B-FEAD-4734-819F-93EF4B0EA908}" type="datetime1">
               <a:rPr lang="en-GB" smtClean="0"/>
-              <a:t>11/01/2026</a:t>
+              <a:t>11/03/2026</a:t>
             </a:fld>
             <a:endParaRPr lang="en-GB"/>
           </a:p>
@@ -1804,7 +1803,7 @@
           <a:p>
             <a:fld id="{D2D5D4B4-C926-4B45-8815-1ED8911179A2}" type="datetime1">
               <a:rPr lang="en-GB" smtClean="0"/>
-              <a:t>11/01/2026</a:t>
+              <a:t>11/03/2026</a:t>
             </a:fld>
             <a:endParaRPr lang="en-GB"/>
           </a:p>
@@ -2072,7 +2071,7 @@
           <a:p>
             <a:fld id="{B4C5210A-0E37-4935-93AF-69F21A5F712F}" type="datetime1">
               <a:rPr lang="en-GB" smtClean="0"/>
-              <a:t>11/01/2026</a:t>
+              <a:t>11/03/2026</a:t>
             </a:fld>
             <a:endParaRPr lang="en-GB"/>
           </a:p>
@@ -2487,7 +2486,7 @@
           <a:p>
             <a:fld id="{3D3A6B2F-436C-4691-80E8-9C890E000E9D}" type="datetime1">
               <a:rPr lang="en-GB" smtClean="0"/>
-              <a:t>11/01/2026</a:t>
+              <a:t>11/03/2026</a:t>
             </a:fld>
             <a:endParaRPr lang="en-GB"/>
           </a:p>
@@ -2629,7 +2628,7 @@
           <a:p>
             <a:fld id="{84385F4C-D74B-496F-8D21-97E3549C783B}" type="datetime1">
               <a:rPr lang="en-GB" smtClean="0"/>
-              <a:t>11/01/2026</a:t>
+              <a:t>11/03/2026</a:t>
             </a:fld>
             <a:endParaRPr lang="en-GB"/>
           </a:p>
@@ -2742,7 +2741,7 @@
           <a:p>
             <a:fld id="{0CBDCB32-C241-4703-A832-4EB47BD54E83}" type="datetime1">
               <a:rPr lang="en-GB" smtClean="0"/>
-              <a:t>11/01/2026</a:t>
+              <a:t>11/03/2026</a:t>
             </a:fld>
             <a:endParaRPr lang="en-GB"/>
           </a:p>
@@ -3055,7 +3054,7 @@
           <a:p>
             <a:fld id="{85C150FF-BE95-4D25-A16A-E368A81CBF24}" type="datetime1">
               <a:rPr lang="en-GB" smtClean="0"/>
-              <a:t>11/01/2026</a:t>
+              <a:t>11/03/2026</a:t>
             </a:fld>
             <a:endParaRPr lang="en-GB"/>
           </a:p>
@@ -3344,7 +3343,7 @@
           <a:p>
             <a:fld id="{F3C5DB4B-B349-43C9-A424-BADA723AD9F1}" type="datetime1">
               <a:rPr lang="en-GB" smtClean="0"/>
-              <a:t>11/01/2026</a:t>
+              <a:t>11/03/2026</a:t>
             </a:fld>
             <a:endParaRPr lang="en-GB"/>
           </a:p>
@@ -3587,7 +3586,7 @@
           <a:p>
             <a:fld id="{12632426-0A0C-405F-A3D0-2D11AA44702A}" type="datetime1">
               <a:rPr lang="en-GB" smtClean="0"/>
-              <a:t>11/01/2026</a:t>
+              <a:t>11/03/2026</a:t>
             </a:fld>
             <a:endParaRPr lang="en-GB"/>
           </a:p>
@@ -5279,8 +5278,8 @@
           </p:sp>
         </mc:Fallback>
       </mc:AlternateContent>
-      <mc:AlternateContent xmlns:mc="http://schemas.openxmlformats.org/markup-compatibility/2006">
-        <mc:Choice xmlns:a14="http://schemas.microsoft.com/office/drawing/2010/main" Requires="a14">
+      <mc:AlternateContent xmlns:mc="http://schemas.openxmlformats.org/markup-compatibility/2006" xmlns:a14="http://schemas.microsoft.com/office/drawing/2010/main">
+        <mc:Choice Requires="a14">
           <p:sp>
             <p:nvSpPr>
               <p:cNvPr id="6" name="TextBox 5">
@@ -5337,7 +5336,7 @@
             </p:txBody>
           </p:sp>
         </mc:Choice>
-        <mc:Fallback>
+        <mc:Fallback xmlns="">
           <p:sp>
             <p:nvSpPr>
               <p:cNvPr id="6" name="TextBox 5">
@@ -5950,8 +5949,8 @@
           </a:p>
         </p:txBody>
       </p:sp>
-      <mc:AlternateContent xmlns:mc="http://schemas.openxmlformats.org/markup-compatibility/2006">
-        <mc:Choice xmlns:a14="http://schemas.microsoft.com/office/drawing/2010/main" Requires="a14">
+      <mc:AlternateContent xmlns:mc="http://schemas.openxmlformats.org/markup-compatibility/2006" xmlns:a14="http://schemas.microsoft.com/office/drawing/2010/main">
+        <mc:Choice Requires="a14">
           <p:sp>
             <p:nvSpPr>
               <p:cNvPr id="6" name="TextBox 5">
@@ -6122,7 +6121,7 @@
             </p:txBody>
           </p:sp>
         </mc:Choice>
-        <mc:Fallback>
+        <mc:Fallback xmlns="">
           <p:sp>
             <p:nvSpPr>
               <p:cNvPr id="6" name="TextBox 5">
@@ -6604,8 +6603,8 @@
           </p:sp>
         </mc:Fallback>
       </mc:AlternateContent>
-      <mc:AlternateContent xmlns:mc="http://schemas.openxmlformats.org/markup-compatibility/2006">
-        <mc:Choice xmlns:a14="http://schemas.microsoft.com/office/drawing/2010/main" Requires="a14">
+      <mc:AlternateContent xmlns:mc="http://schemas.openxmlformats.org/markup-compatibility/2006" xmlns:a14="http://schemas.microsoft.com/office/drawing/2010/main">
+        <mc:Choice Requires="a14">
           <p:sp>
             <p:nvSpPr>
               <p:cNvPr id="61" name="TextBox 60">
@@ -6675,7 +6674,7 @@
             </p:txBody>
           </p:sp>
         </mc:Choice>
-        <mc:Fallback>
+        <mc:Fallback xmlns="">
           <p:sp>
             <p:nvSpPr>
               <p:cNvPr id="61" name="TextBox 60">
@@ -6725,6 +6724,56 @@
           </p:sp>
         </mc:Fallback>
       </mc:AlternateContent>
+      <p:sp>
+        <p:nvSpPr>
+          <p:cNvPr id="11" name="Textfeld 10">
+            <a:extLst>
+              <a:ext uri="{FF2B5EF4-FFF2-40B4-BE49-F238E27FC236}">
+                <a16:creationId xmlns:a16="http://schemas.microsoft.com/office/drawing/2014/main" id="{DEF0F421-DCCA-25DE-84E8-5D7AF51C10C1}"/>
+              </a:ext>
+            </a:extLst>
+          </p:cNvPr>
+          <p:cNvSpPr txBox="1"/>
+          <p:nvPr/>
+        </p:nvSpPr>
+        <p:spPr>
+          <a:xfrm>
+            <a:off x="838200" y="6245232"/>
+            <a:ext cx="3823252" cy="461665"/>
+          </a:xfrm>
+          <a:prstGeom prst="rect">
+            <a:avLst/>
+          </a:prstGeom>
+          <a:noFill/>
+        </p:spPr>
+        <p:txBody>
+          <a:bodyPr wrap="square">
+            <a:spAutoFit/>
+          </a:bodyPr>
+          <a:lstStyle/>
+          <a:p>
+            <a:r>
+              <a:rPr lang="de-DE" sz="2400" dirty="0">
+                <a:sym typeface="Wingdings" pitchFamily="2" charset="2"/>
+              </a:rPr>
+              <a:t> </a:t>
+            </a:r>
+            <a:r>
+              <a:rPr lang="de-DE" sz="2400" b="1" dirty="0" err="1"/>
+              <a:t>Bayesian</a:t>
+            </a:r>
+            <a:r>
+              <a:rPr lang="de-DE" sz="2400" b="1" dirty="0"/>
+              <a:t> </a:t>
+            </a:r>
+            <a:r>
+              <a:rPr lang="de-DE" sz="2400" b="1" dirty="0" err="1"/>
+              <a:t>updating</a:t>
+            </a:r>
+            <a:endParaRPr lang="de-DE" sz="2400" b="1" dirty="0"/>
+          </a:p>
+        </p:txBody>
+      </p:sp>
     </p:spTree>
     <p:extLst>
       <p:ext uri="{BB962C8B-B14F-4D97-AF65-F5344CB8AC3E}">
@@ -6739,436 +6788,6 @@
 </file>
 
 <file path=ppt/slides/slide19.xml><?xml version="1.0" encoding="utf-8"?>
-<p:sld xmlns:a="http://schemas.openxmlformats.org/drawingml/2006/main" xmlns:r="http://schemas.openxmlformats.org/officeDocument/2006/relationships" xmlns:p="http://schemas.openxmlformats.org/presentationml/2006/main">
-  <p:cSld>
-    <p:spTree>
-      <p:nvGrpSpPr>
-        <p:cNvPr id="1" name=""/>
-        <p:cNvGrpSpPr/>
-        <p:nvPr/>
-      </p:nvGrpSpPr>
-      <p:grpSpPr>
-        <a:xfrm>
-          <a:off x="0" y="0"/>
-          <a:ext cx="0" cy="0"/>
-          <a:chOff x="0" y="0"/>
-          <a:chExt cx="0" cy="0"/>
-        </a:xfrm>
-      </p:grpSpPr>
-      <p:sp>
-        <p:nvSpPr>
-          <p:cNvPr id="2" name="Titel 1">
-            <a:extLst>
-              <a:ext uri="{FF2B5EF4-FFF2-40B4-BE49-F238E27FC236}">
-                <a16:creationId xmlns:a16="http://schemas.microsoft.com/office/drawing/2014/main" id="{AD0CCA7D-201C-4AA2-C9D1-773241E4EE36}"/>
-              </a:ext>
-            </a:extLst>
-          </p:cNvPr>
-          <p:cNvSpPr>
-            <a:spLocks noGrp="1"/>
-          </p:cNvSpPr>
-          <p:nvPr>
-            <p:ph type="title"/>
-          </p:nvPr>
-        </p:nvSpPr>
-        <p:spPr/>
-        <p:txBody>
-          <a:bodyPr/>
-          <a:lstStyle/>
-          <a:p>
-            <a:r>
-              <a:rPr lang="de-DE" dirty="0" err="1"/>
-              <a:t>Bayesian</a:t>
-            </a:r>
-            <a:r>
-              <a:rPr lang="de-DE" dirty="0"/>
-              <a:t> </a:t>
-            </a:r>
-            <a:r>
-              <a:rPr lang="de-DE" dirty="0" err="1"/>
-              <a:t>Updating</a:t>
-            </a:r>
-            <a:endParaRPr lang="de-DE" dirty="0"/>
-          </a:p>
-        </p:txBody>
-      </p:sp>
-      <p:sp>
-        <p:nvSpPr>
-          <p:cNvPr id="3" name="Inhaltsplatzhalter 2">
-            <a:extLst>
-              <a:ext uri="{FF2B5EF4-FFF2-40B4-BE49-F238E27FC236}">
-                <a16:creationId xmlns:a16="http://schemas.microsoft.com/office/drawing/2014/main" id="{5278DDB8-2323-E955-7B2C-5EA77375E9CA}"/>
-              </a:ext>
-            </a:extLst>
-          </p:cNvPr>
-          <p:cNvSpPr>
-            <a:spLocks noGrp="1"/>
-          </p:cNvSpPr>
-          <p:nvPr>
-            <p:ph idx="1"/>
-          </p:nvPr>
-        </p:nvSpPr>
-        <p:spPr/>
-        <p:txBody>
-          <a:bodyPr/>
-          <a:lstStyle/>
-          <a:p>
-            <a:endParaRPr lang="de-DE"/>
-          </a:p>
-        </p:txBody>
-      </p:sp>
-      <p:sp>
-        <p:nvSpPr>
-          <p:cNvPr id="4" name="Foliennummernplatzhalter 3">
-            <a:extLst>
-              <a:ext uri="{FF2B5EF4-FFF2-40B4-BE49-F238E27FC236}">
-                <a16:creationId xmlns:a16="http://schemas.microsoft.com/office/drawing/2014/main" id="{FA4F8D4A-4E07-4A27-3B25-1311C4CA44F1}"/>
-              </a:ext>
-            </a:extLst>
-          </p:cNvPr>
-          <p:cNvSpPr>
-            <a:spLocks noGrp="1"/>
-          </p:cNvSpPr>
-          <p:nvPr>
-            <p:ph type="sldNum" sz="quarter" idx="12"/>
-          </p:nvPr>
-        </p:nvSpPr>
-        <p:spPr/>
-        <p:txBody>
-          <a:bodyPr/>
-          <a:lstStyle/>
-          <a:p>
-            <a:fld id="{08C366F5-AFAD-49CB-854A-9D9E238FCA13}" type="slidenum">
-              <a:rPr lang="en-GB" smtClean="0"/>
-              <a:t>19</a:t>
-            </a:fld>
-            <a:endParaRPr lang="en-GB"/>
-          </a:p>
-        </p:txBody>
-      </p:sp>
-    </p:spTree>
-    <p:extLst>
-      <p:ext uri="{BB962C8B-B14F-4D97-AF65-F5344CB8AC3E}">
-        <p14:creationId xmlns:p14="http://schemas.microsoft.com/office/powerpoint/2010/main" val="2675213393"/>
-      </p:ext>
-    </p:extLst>
-  </p:cSld>
-  <p:clrMapOvr>
-    <a:masterClrMapping/>
-  </p:clrMapOvr>
-</p:sld>
-</file>
-
-<file path=ppt/slides/slide2.xml><?xml version="1.0" encoding="utf-8"?>
-<p:sld xmlns:a="http://schemas.openxmlformats.org/drawingml/2006/main" xmlns:r="http://schemas.openxmlformats.org/officeDocument/2006/relationships" xmlns:p="http://schemas.openxmlformats.org/presentationml/2006/main">
-  <p:cSld>
-    <p:spTree>
-      <p:nvGrpSpPr>
-        <p:cNvPr id="1" name=""/>
-        <p:cNvGrpSpPr/>
-        <p:nvPr/>
-      </p:nvGrpSpPr>
-      <p:grpSpPr>
-        <a:xfrm>
-          <a:off x="0" y="0"/>
-          <a:ext cx="0" cy="0"/>
-          <a:chOff x="0" y="0"/>
-          <a:chExt cx="0" cy="0"/>
-        </a:xfrm>
-      </p:grpSpPr>
-      <p:sp>
-        <p:nvSpPr>
-          <p:cNvPr id="4" name="Title 3">
-            <a:extLst>
-              <a:ext uri="{FF2B5EF4-FFF2-40B4-BE49-F238E27FC236}">
-                <a16:creationId xmlns:a16="http://schemas.microsoft.com/office/drawing/2014/main" id="{080AD447-446B-E09E-6F4A-522C1DBB462E}"/>
-              </a:ext>
-            </a:extLst>
-          </p:cNvPr>
-          <p:cNvSpPr>
-            <a:spLocks noGrp="1"/>
-          </p:cNvSpPr>
-          <p:nvPr>
-            <p:ph type="title"/>
-          </p:nvPr>
-        </p:nvSpPr>
-        <p:spPr/>
-        <p:txBody>
-          <a:bodyPr/>
-          <a:lstStyle/>
-          <a:p>
-            <a:r>
-              <a:rPr lang="en-GB" dirty="0"/>
-              <a:t>Course Schedule</a:t>
-            </a:r>
-          </a:p>
-        </p:txBody>
-      </p:sp>
-      <p:sp>
-        <p:nvSpPr>
-          <p:cNvPr id="6" name="Inhaltsplatzhalter 5">
-            <a:extLst>
-              <a:ext uri="{FF2B5EF4-FFF2-40B4-BE49-F238E27FC236}">
-                <a16:creationId xmlns:a16="http://schemas.microsoft.com/office/drawing/2014/main" id="{CF502483-E45D-7D7D-D169-ACA4F8327D26}"/>
-              </a:ext>
-            </a:extLst>
-          </p:cNvPr>
-          <p:cNvSpPr>
-            <a:spLocks noGrp="1"/>
-          </p:cNvSpPr>
-          <p:nvPr>
-            <p:ph sz="half" idx="1"/>
-          </p:nvPr>
-        </p:nvSpPr>
-        <p:spPr/>
-        <p:txBody>
-          <a:bodyPr>
-            <a:normAutofit lnSpcReduction="10000"/>
-          </a:bodyPr>
-          <a:lstStyle/>
-          <a:p>
-            <a:pPr marL="514350" indent="-514350">
-              <a:buFont typeface="+mj-lt"/>
-              <a:buAutoNum type="arabicPeriod"/>
-            </a:pPr>
-            <a:r>
-              <a:rPr lang="de-DE" dirty="0" err="1"/>
-              <a:t>Exploratory</a:t>
-            </a:r>
-            <a:r>
-              <a:rPr lang="de-DE" dirty="0"/>
-              <a:t> Data Analysis</a:t>
-            </a:r>
-          </a:p>
-          <a:p>
-            <a:pPr marL="514350" indent="-514350">
-              <a:buFont typeface="+mj-lt"/>
-              <a:buAutoNum type="arabicPeriod"/>
-            </a:pPr>
-            <a:endParaRPr lang="de-DE" dirty="0"/>
-          </a:p>
-          <a:p>
-            <a:pPr marL="514350" indent="-514350">
-              <a:buFont typeface="+mj-lt"/>
-              <a:buAutoNum type="arabicPeriod"/>
-            </a:pPr>
-            <a:r>
-              <a:rPr lang="de-DE" dirty="0"/>
-              <a:t>Clustering</a:t>
-            </a:r>
-          </a:p>
-          <a:p>
-            <a:pPr marL="514350" indent="-514350">
-              <a:buFont typeface="+mj-lt"/>
-              <a:buAutoNum type="arabicPeriod"/>
-            </a:pPr>
-            <a:endParaRPr lang="de-DE" dirty="0"/>
-          </a:p>
-          <a:p>
-            <a:pPr marL="514350" indent="-514350">
-              <a:buFont typeface="+mj-lt"/>
-              <a:buAutoNum type="arabicPeriod"/>
-            </a:pPr>
-            <a:r>
-              <a:rPr lang="de-DE" dirty="0" err="1"/>
-              <a:t>Probabilistic</a:t>
-            </a:r>
-            <a:r>
-              <a:rPr lang="de-DE" dirty="0"/>
-              <a:t> Models</a:t>
-            </a:r>
-          </a:p>
-          <a:p>
-            <a:pPr marL="514350" indent="-514350">
-              <a:buFont typeface="+mj-lt"/>
-              <a:buAutoNum type="arabicPeriod"/>
-            </a:pPr>
-            <a:endParaRPr lang="de-DE" dirty="0"/>
-          </a:p>
-          <a:p>
-            <a:pPr marL="514350" indent="-514350">
-              <a:buFont typeface="+mj-lt"/>
-              <a:buAutoNum type="arabicPeriod"/>
-            </a:pPr>
-            <a:r>
-              <a:rPr lang="de-DE" dirty="0"/>
-              <a:t>Statistical </a:t>
-            </a:r>
-            <a:r>
-              <a:rPr lang="de-DE" dirty="0" err="1"/>
-              <a:t>Inference</a:t>
-            </a:r>
-            <a:endParaRPr lang="de-DE" dirty="0"/>
-          </a:p>
-          <a:p>
-            <a:pPr marL="514350" indent="-514350">
-              <a:buFont typeface="+mj-lt"/>
-              <a:buAutoNum type="arabicPeriod"/>
-            </a:pPr>
-            <a:endParaRPr lang="de-DE" dirty="0"/>
-          </a:p>
-          <a:p>
-            <a:pPr marL="514350" indent="-514350">
-              <a:buFont typeface="+mj-lt"/>
-              <a:buAutoNum type="arabicPeriod"/>
-            </a:pPr>
-            <a:r>
-              <a:rPr lang="de-DE" dirty="0" err="1"/>
-              <a:t>Machine</a:t>
-            </a:r>
-            <a:r>
-              <a:rPr lang="de-DE" dirty="0"/>
-              <a:t> Learning</a:t>
-            </a:r>
-          </a:p>
-        </p:txBody>
-      </p:sp>
-      <p:sp>
-        <p:nvSpPr>
-          <p:cNvPr id="7" name="Inhaltsplatzhalter 6">
-            <a:extLst>
-              <a:ext uri="{FF2B5EF4-FFF2-40B4-BE49-F238E27FC236}">
-                <a16:creationId xmlns:a16="http://schemas.microsoft.com/office/drawing/2014/main" id="{B671907E-FFFA-73EF-8E7D-4AB4EBDD957B}"/>
-              </a:ext>
-            </a:extLst>
-          </p:cNvPr>
-          <p:cNvSpPr>
-            <a:spLocks noGrp="1"/>
-          </p:cNvSpPr>
-          <p:nvPr>
-            <p:ph sz="half" idx="2"/>
-          </p:nvPr>
-        </p:nvSpPr>
-        <p:spPr/>
-        <p:txBody>
-          <a:bodyPr>
-            <a:normAutofit lnSpcReduction="10000"/>
-          </a:bodyPr>
-          <a:lstStyle/>
-          <a:p>
-            <a:pPr marL="514350" indent="-514350">
-              <a:buFont typeface="+mj-lt"/>
-              <a:buAutoNum type="arabicPeriod" startAt="6"/>
-            </a:pPr>
-            <a:r>
-              <a:rPr lang="de-DE" dirty="0"/>
-              <a:t>Feature Engineering</a:t>
-            </a:r>
-          </a:p>
-          <a:p>
-            <a:pPr marL="514350" indent="-514350">
-              <a:buFont typeface="+mj-lt"/>
-              <a:buAutoNum type="arabicPeriod" startAt="6"/>
-            </a:pPr>
-            <a:endParaRPr lang="de-DE" dirty="0"/>
-          </a:p>
-          <a:p>
-            <a:pPr marL="514350" indent="-514350">
-              <a:buFont typeface="+mj-lt"/>
-              <a:buAutoNum type="arabicPeriod" startAt="6"/>
-            </a:pPr>
-            <a:r>
-              <a:rPr lang="de-DE" dirty="0"/>
-              <a:t>Model Evaluation</a:t>
-            </a:r>
-          </a:p>
-          <a:p>
-            <a:pPr marL="514350" indent="-514350">
-              <a:buFont typeface="+mj-lt"/>
-              <a:buAutoNum type="arabicPeriod" startAt="6"/>
-            </a:pPr>
-            <a:endParaRPr lang="de-DE" dirty="0"/>
-          </a:p>
-          <a:p>
-            <a:pPr marL="514350" indent="-514350">
-              <a:buFont typeface="+mj-lt"/>
-              <a:buAutoNum type="arabicPeriod" startAt="6"/>
-            </a:pPr>
-            <a:r>
-              <a:rPr lang="de-DE" dirty="0"/>
-              <a:t>Deep Learning</a:t>
-            </a:r>
-          </a:p>
-          <a:p>
-            <a:pPr marL="514350" indent="-514350">
-              <a:buFont typeface="+mj-lt"/>
-              <a:buAutoNum type="arabicPeriod" startAt="6"/>
-            </a:pPr>
-            <a:endParaRPr lang="de-DE" dirty="0"/>
-          </a:p>
-          <a:p>
-            <a:pPr marL="514350" indent="-514350">
-              <a:buFont typeface="+mj-lt"/>
-              <a:buAutoNum type="arabicPeriod" startAt="6"/>
-            </a:pPr>
-            <a:r>
-              <a:rPr lang="de-DE" dirty="0"/>
-              <a:t>Time Series</a:t>
-            </a:r>
-          </a:p>
-          <a:p>
-            <a:pPr marL="514350" indent="-514350">
-              <a:buFont typeface="+mj-lt"/>
-              <a:buAutoNum type="arabicPeriod" startAt="6"/>
-            </a:pPr>
-            <a:endParaRPr lang="de-DE" dirty="0"/>
-          </a:p>
-          <a:p>
-            <a:pPr marL="514350" indent="-514350">
-              <a:buFont typeface="+mj-lt"/>
-              <a:buAutoNum type="arabicPeriod" startAt="6"/>
-            </a:pPr>
-            <a:r>
-              <a:rPr lang="de-DE" dirty="0" err="1"/>
-              <a:t>Causality</a:t>
-            </a:r>
-            <a:endParaRPr lang="de-DE" dirty="0"/>
-          </a:p>
-        </p:txBody>
-      </p:sp>
-      <p:sp>
-        <p:nvSpPr>
-          <p:cNvPr id="3" name="Slide Number Placeholder 2">
-            <a:extLst>
-              <a:ext uri="{FF2B5EF4-FFF2-40B4-BE49-F238E27FC236}">
-                <a16:creationId xmlns:a16="http://schemas.microsoft.com/office/drawing/2014/main" id="{A0664D44-83AC-6A7A-17E0-C1AE2ED18FF5}"/>
-              </a:ext>
-            </a:extLst>
-          </p:cNvPr>
-          <p:cNvSpPr>
-            <a:spLocks noGrp="1"/>
-          </p:cNvSpPr>
-          <p:nvPr>
-            <p:ph type="sldNum" sz="quarter" idx="12"/>
-          </p:nvPr>
-        </p:nvSpPr>
-        <p:spPr/>
-        <p:txBody>
-          <a:bodyPr/>
-          <a:lstStyle/>
-          <a:p>
-            <a:fld id="{08C366F5-AFAD-49CB-854A-9D9E238FCA13}" type="slidenum">
-              <a:rPr lang="en-GB" smtClean="0"/>
-              <a:t>2</a:t>
-            </a:fld>
-            <a:endParaRPr lang="en-GB" dirty="0"/>
-          </a:p>
-        </p:txBody>
-      </p:sp>
-    </p:spTree>
-    <p:extLst>
-      <p:ext uri="{BB962C8B-B14F-4D97-AF65-F5344CB8AC3E}">
-        <p14:creationId xmlns:p14="http://schemas.microsoft.com/office/powerpoint/2010/main" val="310336692"/>
-      </p:ext>
-    </p:extLst>
-  </p:cSld>
-  <p:clrMapOvr>
-    <a:masterClrMapping/>
-  </p:clrMapOvr>
-</p:sld>
-</file>
-
-<file path=ppt/slides/slide20.xml><?xml version="1.0" encoding="utf-8"?>
 <p:sld xmlns:a="http://schemas.openxmlformats.org/drawingml/2006/main" xmlns:r="http://schemas.openxmlformats.org/officeDocument/2006/relationships" xmlns:p="http://schemas.openxmlformats.org/presentationml/2006/main">
   <p:cSld>
     <p:spTree>
@@ -8098,7 +7717,7 @@
           <a:p>
             <a:fld id="{77E1BB0D-8AD4-A14C-8FD5-F1619D1A43A2}" type="slidenum">
               <a:rPr lang="en-DE" smtClean="0"/>
-              <a:t>20</a:t>
+              <a:t>19</a:t>
             </a:fld>
             <a:endParaRPr lang="en-DE"/>
           </a:p>
@@ -8275,7 +7894,7 @@
 </p:sld>
 </file>
 
-<file path=ppt/slides/slide21.xml><?xml version="1.0" encoding="utf-8"?>
+<file path=ppt/slides/slide2.xml><?xml version="1.0" encoding="utf-8"?>
 <p:sld xmlns:a="http://schemas.openxmlformats.org/drawingml/2006/main" xmlns:r="http://schemas.openxmlformats.org/officeDocument/2006/relationships" xmlns:p="http://schemas.openxmlformats.org/presentationml/2006/main">
   <p:cSld>
     <p:spTree>
@@ -8294,6 +7913,315 @@
       </p:grpSpPr>
       <p:sp>
         <p:nvSpPr>
+          <p:cNvPr id="4" name="Title 3">
+            <a:extLst>
+              <a:ext uri="{FF2B5EF4-FFF2-40B4-BE49-F238E27FC236}">
+                <a16:creationId xmlns:a16="http://schemas.microsoft.com/office/drawing/2014/main" id="{080AD447-446B-E09E-6F4A-522C1DBB462E}"/>
+              </a:ext>
+            </a:extLst>
+          </p:cNvPr>
+          <p:cNvSpPr>
+            <a:spLocks noGrp="1"/>
+          </p:cNvSpPr>
+          <p:nvPr>
+            <p:ph type="title"/>
+          </p:nvPr>
+        </p:nvSpPr>
+        <p:spPr/>
+        <p:txBody>
+          <a:bodyPr/>
+          <a:lstStyle/>
+          <a:p>
+            <a:r>
+              <a:rPr lang="en-GB" dirty="0"/>
+              <a:t>Course Schedule</a:t>
+            </a:r>
+          </a:p>
+        </p:txBody>
+      </p:sp>
+      <p:sp>
+        <p:nvSpPr>
+          <p:cNvPr id="6" name="Inhaltsplatzhalter 5">
+            <a:extLst>
+              <a:ext uri="{FF2B5EF4-FFF2-40B4-BE49-F238E27FC236}">
+                <a16:creationId xmlns:a16="http://schemas.microsoft.com/office/drawing/2014/main" id="{CF502483-E45D-7D7D-D169-ACA4F8327D26}"/>
+              </a:ext>
+            </a:extLst>
+          </p:cNvPr>
+          <p:cNvSpPr>
+            <a:spLocks noGrp="1"/>
+          </p:cNvSpPr>
+          <p:nvPr>
+            <p:ph sz="half" idx="1"/>
+          </p:nvPr>
+        </p:nvSpPr>
+        <p:spPr/>
+        <p:txBody>
+          <a:bodyPr>
+            <a:normAutofit lnSpcReduction="10000"/>
+          </a:bodyPr>
+          <a:lstStyle/>
+          <a:p>
+            <a:pPr marL="514350" indent="-514350">
+              <a:buFont typeface="+mj-lt"/>
+              <a:buAutoNum type="arabicPeriod"/>
+            </a:pPr>
+            <a:r>
+              <a:rPr lang="de-DE" dirty="0" err="1"/>
+              <a:t>Exploratory</a:t>
+            </a:r>
+            <a:r>
+              <a:rPr lang="de-DE" dirty="0"/>
+              <a:t> Data Analysis</a:t>
+            </a:r>
+          </a:p>
+          <a:p>
+            <a:pPr marL="514350" indent="-514350">
+              <a:buFont typeface="+mj-lt"/>
+              <a:buAutoNum type="arabicPeriod"/>
+            </a:pPr>
+            <a:endParaRPr lang="de-DE" dirty="0"/>
+          </a:p>
+          <a:p>
+            <a:pPr marL="514350" indent="-514350">
+              <a:buFont typeface="+mj-lt"/>
+              <a:buAutoNum type="arabicPeriod"/>
+            </a:pPr>
+            <a:r>
+              <a:rPr lang="de-DE" dirty="0"/>
+              <a:t>Clustering</a:t>
+            </a:r>
+          </a:p>
+          <a:p>
+            <a:pPr marL="514350" indent="-514350">
+              <a:buFont typeface="+mj-lt"/>
+              <a:buAutoNum type="arabicPeriod"/>
+            </a:pPr>
+            <a:endParaRPr lang="de-DE" dirty="0"/>
+          </a:p>
+          <a:p>
+            <a:pPr marL="514350" indent="-514350">
+              <a:buFont typeface="+mj-lt"/>
+              <a:buAutoNum type="arabicPeriod"/>
+            </a:pPr>
+            <a:r>
+              <a:rPr lang="de-DE" dirty="0" err="1"/>
+              <a:t>Probabilistic</a:t>
+            </a:r>
+            <a:r>
+              <a:rPr lang="de-DE" dirty="0"/>
+              <a:t> Models</a:t>
+            </a:r>
+          </a:p>
+          <a:p>
+            <a:pPr marL="514350" indent="-514350">
+              <a:buFont typeface="+mj-lt"/>
+              <a:buAutoNum type="arabicPeriod"/>
+            </a:pPr>
+            <a:endParaRPr lang="de-DE" dirty="0"/>
+          </a:p>
+          <a:p>
+            <a:pPr marL="514350" indent="-514350">
+              <a:buFont typeface="+mj-lt"/>
+              <a:buAutoNum type="arabicPeriod"/>
+            </a:pPr>
+            <a:r>
+              <a:rPr lang="de-DE" dirty="0"/>
+              <a:t>Statistical </a:t>
+            </a:r>
+            <a:r>
+              <a:rPr lang="de-DE" dirty="0" err="1"/>
+              <a:t>Inference</a:t>
+            </a:r>
+            <a:endParaRPr lang="de-DE" dirty="0"/>
+          </a:p>
+          <a:p>
+            <a:pPr marL="514350" indent="-514350">
+              <a:buFont typeface="+mj-lt"/>
+              <a:buAutoNum type="arabicPeriod"/>
+            </a:pPr>
+            <a:endParaRPr lang="de-DE" dirty="0"/>
+          </a:p>
+          <a:p>
+            <a:pPr marL="514350" indent="-514350">
+              <a:buFont typeface="+mj-lt"/>
+              <a:buAutoNum type="arabicPeriod"/>
+            </a:pPr>
+            <a:r>
+              <a:rPr lang="de-DE" dirty="0" err="1"/>
+              <a:t>Machine</a:t>
+            </a:r>
+            <a:r>
+              <a:rPr lang="de-DE" dirty="0"/>
+              <a:t> Learning</a:t>
+            </a:r>
+          </a:p>
+        </p:txBody>
+      </p:sp>
+      <p:sp>
+        <p:nvSpPr>
+          <p:cNvPr id="7" name="Inhaltsplatzhalter 6">
+            <a:extLst>
+              <a:ext uri="{FF2B5EF4-FFF2-40B4-BE49-F238E27FC236}">
+                <a16:creationId xmlns:a16="http://schemas.microsoft.com/office/drawing/2014/main" id="{B671907E-FFFA-73EF-8E7D-4AB4EBDD957B}"/>
+              </a:ext>
+            </a:extLst>
+          </p:cNvPr>
+          <p:cNvSpPr>
+            <a:spLocks noGrp="1"/>
+          </p:cNvSpPr>
+          <p:nvPr>
+            <p:ph sz="half" idx="2"/>
+          </p:nvPr>
+        </p:nvSpPr>
+        <p:spPr/>
+        <p:txBody>
+          <a:bodyPr>
+            <a:normAutofit lnSpcReduction="10000"/>
+          </a:bodyPr>
+          <a:lstStyle/>
+          <a:p>
+            <a:pPr marL="514350" indent="-514350">
+              <a:buFont typeface="+mj-lt"/>
+              <a:buAutoNum type="arabicPeriod" startAt="6"/>
+            </a:pPr>
+            <a:r>
+              <a:rPr lang="de-DE" dirty="0"/>
+              <a:t>Feature Engineering</a:t>
+            </a:r>
+          </a:p>
+          <a:p>
+            <a:pPr marL="514350" indent="-514350">
+              <a:buFont typeface="+mj-lt"/>
+              <a:buAutoNum type="arabicPeriod" startAt="6"/>
+            </a:pPr>
+            <a:endParaRPr lang="de-DE" dirty="0"/>
+          </a:p>
+          <a:p>
+            <a:pPr marL="514350" indent="-514350">
+              <a:buFont typeface="+mj-lt"/>
+              <a:buAutoNum type="arabicPeriod" startAt="6"/>
+            </a:pPr>
+            <a:r>
+              <a:rPr lang="de-DE" dirty="0"/>
+              <a:t>Model Evaluation</a:t>
+            </a:r>
+          </a:p>
+          <a:p>
+            <a:pPr marL="514350" indent="-514350">
+              <a:buFont typeface="+mj-lt"/>
+              <a:buAutoNum type="arabicPeriod" startAt="6"/>
+            </a:pPr>
+            <a:endParaRPr lang="de-DE" dirty="0"/>
+          </a:p>
+          <a:p>
+            <a:pPr marL="514350" indent="-514350">
+              <a:buFont typeface="+mj-lt"/>
+              <a:buAutoNum type="arabicPeriod" startAt="6"/>
+            </a:pPr>
+            <a:r>
+              <a:rPr lang="de-DE" dirty="0"/>
+              <a:t>Deep Learning</a:t>
+            </a:r>
+          </a:p>
+          <a:p>
+            <a:pPr marL="514350" indent="-514350">
+              <a:buFont typeface="+mj-lt"/>
+              <a:buAutoNum type="arabicPeriod" startAt="6"/>
+            </a:pPr>
+            <a:endParaRPr lang="de-DE" dirty="0"/>
+          </a:p>
+          <a:p>
+            <a:pPr marL="514350" indent="-514350">
+              <a:buFont typeface="+mj-lt"/>
+              <a:buAutoNum type="arabicPeriod" startAt="6"/>
+            </a:pPr>
+            <a:r>
+              <a:rPr lang="de-DE" dirty="0"/>
+              <a:t>Time Series</a:t>
+            </a:r>
+          </a:p>
+          <a:p>
+            <a:pPr marL="514350" indent="-514350">
+              <a:buFont typeface="+mj-lt"/>
+              <a:buAutoNum type="arabicPeriod" startAt="6"/>
+            </a:pPr>
+            <a:endParaRPr lang="de-DE" dirty="0"/>
+          </a:p>
+          <a:p>
+            <a:pPr marL="514350" indent="-514350">
+              <a:buFont typeface="+mj-lt"/>
+              <a:buAutoNum type="arabicPeriod" startAt="6"/>
+            </a:pPr>
+            <a:r>
+              <a:rPr lang="de-DE" dirty="0" err="1"/>
+              <a:t>Causality</a:t>
+            </a:r>
+            <a:endParaRPr lang="de-DE" dirty="0"/>
+          </a:p>
+        </p:txBody>
+      </p:sp>
+      <p:sp>
+        <p:nvSpPr>
+          <p:cNvPr id="3" name="Slide Number Placeholder 2">
+            <a:extLst>
+              <a:ext uri="{FF2B5EF4-FFF2-40B4-BE49-F238E27FC236}">
+                <a16:creationId xmlns:a16="http://schemas.microsoft.com/office/drawing/2014/main" id="{A0664D44-83AC-6A7A-17E0-C1AE2ED18FF5}"/>
+              </a:ext>
+            </a:extLst>
+          </p:cNvPr>
+          <p:cNvSpPr>
+            <a:spLocks noGrp="1"/>
+          </p:cNvSpPr>
+          <p:nvPr>
+            <p:ph type="sldNum" sz="quarter" idx="12"/>
+          </p:nvPr>
+        </p:nvSpPr>
+        <p:spPr/>
+        <p:txBody>
+          <a:bodyPr/>
+          <a:lstStyle/>
+          <a:p>
+            <a:fld id="{08C366F5-AFAD-49CB-854A-9D9E238FCA13}" type="slidenum">
+              <a:rPr lang="en-GB" smtClean="0"/>
+              <a:t>2</a:t>
+            </a:fld>
+            <a:endParaRPr lang="en-GB" dirty="0"/>
+          </a:p>
+        </p:txBody>
+      </p:sp>
+    </p:spTree>
+    <p:extLst>
+      <p:ext uri="{BB962C8B-B14F-4D97-AF65-F5344CB8AC3E}">
+        <p14:creationId xmlns:p14="http://schemas.microsoft.com/office/powerpoint/2010/main" val="310336692"/>
+      </p:ext>
+    </p:extLst>
+  </p:cSld>
+  <p:clrMapOvr>
+    <a:masterClrMapping/>
+  </p:clrMapOvr>
+</p:sld>
+</file>
+
+<file path=ppt/slides/slide20.xml><?xml version="1.0" encoding="utf-8"?>
+<p:sld xmlns:a="http://schemas.openxmlformats.org/drawingml/2006/main" xmlns:r="http://schemas.openxmlformats.org/officeDocument/2006/relationships" xmlns:p="http://schemas.openxmlformats.org/presentationml/2006/main">
+  <p:cSld>
+    <p:spTree>
+      <p:nvGrpSpPr>
+        <p:cNvPr id="1" name=""/>
+        <p:cNvGrpSpPr/>
+        <p:nvPr/>
+      </p:nvGrpSpPr>
+      <p:grpSpPr>
+        <a:xfrm>
+          <a:off x="0" y="0"/>
+          <a:ext cx="0" cy="0"/>
+          <a:chOff x="0" y="0"/>
+          <a:chExt cx="0" cy="0"/>
+        </a:xfrm>
+      </p:grpSpPr>
+      <p:sp>
+        <p:nvSpPr>
           <p:cNvPr id="2" name="Titel 1">
             <a:extLst>
               <a:ext uri="{FF2B5EF4-FFF2-40B4-BE49-F238E27FC236}">
@@ -8372,7 +8300,7 @@
           <a:p>
             <a:fld id="{08C366F5-AFAD-49CB-854A-9D9E238FCA13}" type="slidenum">
               <a:rPr lang="en-GB" smtClean="0"/>
-              <a:t>21</a:t>
+              <a:t>20</a:t>
             </a:fld>
             <a:endParaRPr lang="en-GB"/>
           </a:p>
@@ -8391,7 +8319,7 @@
 </p:sld>
 </file>
 
-<file path=ppt/slides/slide22.xml><?xml version="1.0" encoding="utf-8"?>
+<file path=ppt/slides/slide21.xml><?xml version="1.0" encoding="utf-8"?>
 <p:sld xmlns:a="http://schemas.openxmlformats.org/drawingml/2006/main" xmlns:r="http://schemas.openxmlformats.org/officeDocument/2006/relationships" xmlns:p="http://schemas.openxmlformats.org/presentationml/2006/main">
   <p:cSld>
     <p:spTree>
@@ -8671,7 +8599,7 @@
           <a:p>
             <a:fld id="{77E1BB0D-8AD4-A14C-8FD5-F1619D1A43A2}" type="slidenum">
               <a:rPr lang="en-DE" smtClean="0"/>
-              <a:t>22</a:t>
+              <a:t>21</a:t>
             </a:fld>
             <a:endParaRPr lang="en-DE"/>
           </a:p>
@@ -8690,7 +8618,7 @@
 </p:sld>
 </file>
 
-<file path=ppt/slides/slide23.xml><?xml version="1.0" encoding="utf-8"?>
+<file path=ppt/slides/slide22.xml><?xml version="1.0" encoding="utf-8"?>
 <p:sld xmlns:a="http://schemas.openxmlformats.org/drawingml/2006/main" xmlns:r="http://schemas.openxmlformats.org/officeDocument/2006/relationships" xmlns:p="http://schemas.openxmlformats.org/presentationml/2006/main">
   <p:cSld>
     <p:spTree>
@@ -8803,7 +8731,7 @@
           <a:p>
             <a:fld id="{08C366F5-AFAD-49CB-854A-9D9E238FCA13}" type="slidenum">
               <a:rPr lang="en-GB" smtClean="0"/>
-              <a:t>23</a:t>
+              <a:t>22</a:t>
             </a:fld>
             <a:endParaRPr lang="en-GB"/>
           </a:p>
